--- a/templates/zones-sf-a4.pptx
+++ b/templates/zones-sf-a4.pptx
@@ -8,7 +8,7 @@
     <p:notesMasterId r:id="rId17"/>
   </p:notesMasterIdLst>
   <p:sldIdLst/>
-  <p:sldSz cx="10691813" cy="7559675"/>
+  <p:sldSz cx="10692000" cy="7560000"/>
   <p:notesSz cx="6797675" cy="9926638"/>
   <p:defaultTextStyle>
     <a:defPPr>
